--- a/dist/초2/음악·미술/관찰과표현/초2_음악·미술_관찰과표현_01_자세히보고그리기_학생용.pptx
+++ b/dist/초2/음악·미술/관찰과표현/초2_음악·미술_관찰과표현_01_자세히보고그리기_학생용.pptx
@@ -114,34 +114,34 @@
   <p:extLst>
     <p:ext uri="{521415D9-36F7-43E2-AB2F-B90AF26B5E84}">
       <p14:sectionLst xmlns:p14="http://schemas.microsoft.com/office/powerpoint/2010/main">
-        <p14:section name="도입" id="{8bc9f850-0319-7b8c-8411-0c412db395be}">
+        <p14:section name="도입" id="{d7081d36-e060-d1a3-84ee-78a054317f06}">
           <p14:sldIdLst>
             <p14:sldId id="256"/>
             <p14:sldId id="257"/>
           </p14:sldIdLst>
         </p14:section>
-        <p14:section name="개념" id="{7c7c4156-73a3-7a9f-75a5-16c77ec4d12a}">
+        <p14:section name="개념" id="{cbbae0f5-c7a9-d3c4-9209-16b679ed9fa0}">
           <p14:sldIdLst>
             <p14:sldId id="258"/>
           </p14:sldIdLst>
         </p14:section>
-        <p14:section name="연습" id="{fd37f7c9-c73d-571a-e538-11a51236ed8d}">
+        <p14:section name="연습" id="{f2c5564b-4ce8-7160-c3bb-4ed04e4ca518}">
           <p14:sldIdLst>
             <p14:sldId id="259"/>
             <p14:sldId id="260"/>
           </p14:sldIdLst>
         </p14:section>
-        <p14:section name="확인" id="{695e6f90-cd17-6d94-cd38-86e6649b4d1f}">
+        <p14:section name="확인" id="{3aa8d32a-730f-47d7-e44c-25212e51193b}">
           <p14:sldIdLst>
             <p14:sldId id="261"/>
           </p14:sldIdLst>
         </p14:section>
-        <p14:section name="정리" id="{bce860cb-1602-8f11-a8d4-76139cd7f2cc}">
+        <p14:section name="정리" id="{880f7911-f278-fef9-62cd-48d80e9ee6c3}">
           <p14:sldIdLst>
             <p14:sldId id="262"/>
           </p14:sldIdLst>
         </p14:section>
-        <p14:section name="보충" id="{38deecf1-e230-19c9-4536-19c70c0b6b78}">
+        <p14:section name="보충" id="{d8b6788c-ae28-dcd8-2413-04bf1ced7dd9}">
           <p14:sldIdLst>
             <p14:sldId id="263"/>
           </p14:sldIdLst>

--- a/dist/초2/음악·미술/관찰과표현/초2_음악·미술_관찰과표현_01_자세히보고그리기_학생용.pptx
+++ b/dist/초2/음악·미술/관찰과표현/초2_음악·미술_관찰과표현_01_자세히보고그리기_학생용.pptx
@@ -114,34 +114,34 @@
   <p:extLst>
     <p:ext uri="{521415D9-36F7-43E2-AB2F-B90AF26B5E84}">
       <p14:sectionLst xmlns:p14="http://schemas.microsoft.com/office/powerpoint/2010/main">
-        <p14:section name="도입" id="{d7081d36-e060-d1a3-84ee-78a054317f06}">
+        <p14:section name="도입" id="{aa04ccc6-ea78-251c-c5c9-9ca6125ff686}">
           <p14:sldIdLst>
             <p14:sldId id="256"/>
             <p14:sldId id="257"/>
           </p14:sldIdLst>
         </p14:section>
-        <p14:section name="개념" id="{cbbae0f5-c7a9-d3c4-9209-16b679ed9fa0}">
+        <p14:section name="개념" id="{6d5377ad-deaa-35d1-ece3-a9c81988bc9f}">
           <p14:sldIdLst>
             <p14:sldId id="258"/>
           </p14:sldIdLst>
         </p14:section>
-        <p14:section name="연습" id="{f2c5564b-4ce8-7160-c3bb-4ed04e4ca518}">
+        <p14:section name="연습" id="{9f35c5d0-3997-d14c-8d41-fc5cce1e8da0}">
           <p14:sldIdLst>
             <p14:sldId id="259"/>
             <p14:sldId id="260"/>
           </p14:sldIdLst>
         </p14:section>
-        <p14:section name="확인" id="{3aa8d32a-730f-47d7-e44c-25212e51193b}">
+        <p14:section name="확인" id="{c59bfdd9-1ae7-47b4-8fc2-75e595935b90}">
           <p14:sldIdLst>
             <p14:sldId id="261"/>
           </p14:sldIdLst>
         </p14:section>
-        <p14:section name="정리" id="{880f7911-f278-fef9-62cd-48d80e9ee6c3}">
+        <p14:section name="정리" id="{5d7de56b-386e-381d-6f2f-4aae20fb9223}">
           <p14:sldIdLst>
             <p14:sldId id="262"/>
           </p14:sldIdLst>
         </p14:section>
-        <p14:section name="보충" id="{d8b6788c-ae28-dcd8-2413-04bf1ced7dd9}">
+        <p14:section name="보충" id="{2389817e-bacb-03a7-9bf1-a56511505ead}">
           <p14:sldIdLst>
             <p14:sldId id="263"/>
           </p14:sldIdLst>
